--- a/2-9Foxtrot.pptx
+++ b/2-9Foxtrot.pptx
@@ -108,6 +108,11 @@
       </a:defRPr>
     </a:lvl9pPr>
   </p:defaultTextStyle>
+  <p:extLst>
+    <p:ext uri="{EFAFB233-063F-42B5-8137-9DF3F51BA10A}">
+      <p15:sldGuideLst xmlns:p15="http://schemas.microsoft.com/office/powerpoint/2012/main"/>
+    </p:ext>
+  </p:extLst>
 </p:presentation>
 </file>
 
@@ -351,7 +356,7 @@
           <a:p>
             <a:fld id="{058F522A-F9A1-46DA-BC32-7F2186898AB4}" type="datetimeFigureOut">
               <a:rPr lang="en-US" smtClean="0"/>
-              <a:t>2/9/2026</a:t>
+              <a:t>2/9/26</a:t>
             </a:fld>
             <a:endParaRPr lang="en-US"/>
           </a:p>
@@ -559,7 +564,7 @@
           <a:p>
             <a:fld id="{058F522A-F9A1-46DA-BC32-7F2186898AB4}" type="datetimeFigureOut">
               <a:rPr lang="en-US" smtClean="0"/>
-              <a:t>2/9/2026</a:t>
+              <a:t>2/9/26</a:t>
             </a:fld>
             <a:endParaRPr lang="en-US"/>
           </a:p>
@@ -829,7 +834,7 @@
           <a:p>
             <a:fld id="{058F522A-F9A1-46DA-BC32-7F2186898AB4}" type="datetimeFigureOut">
               <a:rPr lang="en-US" smtClean="0"/>
-              <a:t>2/9/2026</a:t>
+              <a:t>2/9/26</a:t>
             </a:fld>
             <a:endParaRPr lang="en-US"/>
           </a:p>
@@ -1003,7 +1008,7 @@
           <a:p>
             <a:fld id="{058F522A-F9A1-46DA-BC32-7F2186898AB4}" type="datetimeFigureOut">
               <a:rPr lang="en-US" smtClean="0"/>
-              <a:t>2/9/2026</a:t>
+              <a:t>2/9/26</a:t>
             </a:fld>
             <a:endParaRPr lang="en-US"/>
           </a:p>
@@ -1360,7 +1365,7 @@
           <a:p>
             <a:fld id="{058F522A-F9A1-46DA-BC32-7F2186898AB4}" type="datetimeFigureOut">
               <a:rPr lang="en-US" smtClean="0"/>
-              <a:t>2/9/2026</a:t>
+              <a:t>2/9/26</a:t>
             </a:fld>
             <a:endParaRPr lang="en-US"/>
           </a:p>
@@ -1635,7 +1640,7 @@
           <a:p>
             <a:fld id="{058F522A-F9A1-46DA-BC32-7F2186898AB4}" type="datetimeFigureOut">
               <a:rPr lang="en-US" smtClean="0"/>
-              <a:t>2/9/2026</a:t>
+              <a:t>2/9/26</a:t>
             </a:fld>
             <a:endParaRPr lang="en-US"/>
           </a:p>
@@ -2014,7 +2019,7 @@
           <a:p>
             <a:fld id="{058F522A-F9A1-46DA-BC32-7F2186898AB4}" type="datetimeFigureOut">
               <a:rPr lang="en-US" smtClean="0"/>
-              <a:t>2/9/2026</a:t>
+              <a:t>2/9/26</a:t>
             </a:fld>
             <a:endParaRPr lang="en-US"/>
           </a:p>
@@ -2132,7 +2137,7 @@
           <a:p>
             <a:fld id="{058F522A-F9A1-46DA-BC32-7F2186898AB4}" type="datetimeFigureOut">
               <a:rPr lang="en-US" smtClean="0"/>
-              <a:t>2/9/2026</a:t>
+              <a:t>2/9/26</a:t>
             </a:fld>
             <a:endParaRPr lang="en-US"/>
           </a:p>
@@ -2317,7 +2322,7 @@
           <a:p>
             <a:fld id="{058F522A-F9A1-46DA-BC32-7F2186898AB4}" type="datetimeFigureOut">
               <a:rPr lang="en-US" smtClean="0"/>
-              <a:t>2/9/2026</a:t>
+              <a:t>2/9/26</a:t>
             </a:fld>
             <a:endParaRPr lang="en-US"/>
           </a:p>
@@ -2685,7 +2690,7 @@
           <a:p>
             <a:fld id="{058F522A-F9A1-46DA-BC32-7F2186898AB4}" type="datetimeFigureOut">
               <a:rPr lang="en-US" smtClean="0"/>
-              <a:t>2/9/2026</a:t>
+              <a:t>2/9/26</a:t>
             </a:fld>
             <a:endParaRPr lang="en-US"/>
           </a:p>
@@ -3081,7 +3086,7 @@
           <a:p>
             <a:fld id="{058F522A-F9A1-46DA-BC32-7F2186898AB4}" type="datetimeFigureOut">
               <a:rPr lang="en-US" smtClean="0"/>
-              <a:t>2/9/2026</a:t>
+              <a:t>2/9/26</a:t>
             </a:fld>
             <a:endParaRPr lang="en-US"/>
           </a:p>
@@ -3382,7 +3387,7 @@
           <a:p>
             <a:fld id="{058F522A-F9A1-46DA-BC32-7F2186898AB4}" type="datetimeFigureOut">
               <a:rPr lang="en-US" smtClean="0"/>
-              <a:t>2/9/2026</a:t>
+              <a:t>2/9/26</a:t>
             </a:fld>
             <a:endParaRPr lang="en-US"/>
           </a:p>
@@ -4014,9 +4019,12 @@
           <a:lstStyle/>
           <a:p>
             <a:r>
-              <a:rPr lang="en-US" dirty="0"/>
+              <a:rPr lang="en-US" dirty="0">
+                <a:hlinkClick r:id="rId2"/>
+              </a:rPr>
               <a:t>Kanban</a:t>
             </a:r>
+            <a:endParaRPr lang="en-US" dirty="0"/>
           </a:p>
         </p:txBody>
       </p:sp>
@@ -4035,7 +4043,7 @@
           <p:nvPr/>
         </p:nvPicPr>
         <p:blipFill>
-          <a:blip r:embed="rId2"/>
+          <a:blip r:embed="rId3"/>
           <a:stretch>
             <a:fillRect/>
           </a:stretch>
